--- a/projeto feito 2/Apresentacao_Grupo4.pptx
+++ b/projeto feito 2/Apresentacao_Grupo4.pptx
@@ -2,22 +2,22 @@
 <file path=ppt/presentation.xml><?xml version="1.0" encoding="utf-8"?>
 <p:presentation xmlns:p="http://schemas.openxmlformats.org/presentationml/2006/main">
   <p:sldMasterIdLst>
-    <p:sldMasterId xmlns:r="http://schemas.openxmlformats.org/officeDocument/2006/relationships" id="2147483648" r:id="Rb013622f0a4f4e06"/>
+    <p:sldMasterId xmlns:r="http://schemas.openxmlformats.org/officeDocument/2006/relationships" id="2147483648" r:id="R5645e88a645d4de6"/>
   </p:sldMasterIdLst>
   <p:notesMasterIdLst>
-    <p:notesMasterId xmlns:r="http://schemas.openxmlformats.org/officeDocument/2006/relationships" r:id="Rd29430600c4c4d75"/>
+    <p:notesMasterId xmlns:r="http://schemas.openxmlformats.org/officeDocument/2006/relationships" r:id="R6d2d987a283b4492"/>
   </p:notesMasterIdLst>
   <p:sldIdLst>
-    <p:sldId xmlns:r="http://schemas.openxmlformats.org/officeDocument/2006/relationships" id="256" r:id="R95a980f4fd684fa3"/>
-    <p:sldId xmlns:r="http://schemas.openxmlformats.org/officeDocument/2006/relationships" id="257" r:id="R28287760e9f34b31"/>
-    <p:sldId xmlns:r="http://schemas.openxmlformats.org/officeDocument/2006/relationships" id="258" r:id="Rec0bfecd5f21434b"/>
-    <p:sldId xmlns:r="http://schemas.openxmlformats.org/officeDocument/2006/relationships" id="259" r:id="R9482813ddd354d5b"/>
-    <p:sldId xmlns:r="http://schemas.openxmlformats.org/officeDocument/2006/relationships" id="260" r:id="R1a3d3b6db4e84fae"/>
-    <p:sldId xmlns:r="http://schemas.openxmlformats.org/officeDocument/2006/relationships" id="261" r:id="R8e91f650f43b4e5e"/>
-    <p:sldId xmlns:r="http://schemas.openxmlformats.org/officeDocument/2006/relationships" id="262" r:id="Raf5292cab8e642d3"/>
-    <p:sldId xmlns:r="http://schemas.openxmlformats.org/officeDocument/2006/relationships" id="263" r:id="R887d0297c2a441db"/>
-    <p:sldId xmlns:r="http://schemas.openxmlformats.org/officeDocument/2006/relationships" id="264" r:id="R15e4f7550fb74feb"/>
-    <p:sldId xmlns:r="http://schemas.openxmlformats.org/officeDocument/2006/relationships" id="265" r:id="R1030c8ac97e44a8e"/>
+    <p:sldId xmlns:r="http://schemas.openxmlformats.org/officeDocument/2006/relationships" id="256" r:id="Re10889580ff44ec9"/>
+    <p:sldId xmlns:r="http://schemas.openxmlformats.org/officeDocument/2006/relationships" id="257" r:id="R99bb41af938742ba"/>
+    <p:sldId xmlns:r="http://schemas.openxmlformats.org/officeDocument/2006/relationships" id="258" r:id="R2bdc2d9acb284ea5"/>
+    <p:sldId xmlns:r="http://schemas.openxmlformats.org/officeDocument/2006/relationships" id="259" r:id="Ra3da029f02db41b0"/>
+    <p:sldId xmlns:r="http://schemas.openxmlformats.org/officeDocument/2006/relationships" id="260" r:id="Rb4f8a57825f04ee4"/>
+    <p:sldId xmlns:r="http://schemas.openxmlformats.org/officeDocument/2006/relationships" id="261" r:id="R993cf23c692b48f8"/>
+    <p:sldId xmlns:r="http://schemas.openxmlformats.org/officeDocument/2006/relationships" id="262" r:id="Rabe440ce9ef2494c"/>
+    <p:sldId xmlns:r="http://schemas.openxmlformats.org/officeDocument/2006/relationships" id="263" r:id="R6dbf2dc30059408b"/>
+    <p:sldId xmlns:r="http://schemas.openxmlformats.org/officeDocument/2006/relationships" id="264" r:id="R939041fb42424978"/>
+    <p:sldId xmlns:r="http://schemas.openxmlformats.org/officeDocument/2006/relationships" id="265" r:id="R84cce6872bee422a"/>
   </p:sldIdLst>
   <p:sldSz cx="12192000" cy="6858000"/>
   <p:notesSz cx="6858000" cy="9144000"/>
@@ -661,7 +661,7 @@
           <a:lstStyle xmlns:a="http://schemas.openxmlformats.org/drawingml/2006/main"/>
           <a:p xmlns:a="http://schemas.openxmlformats.org/drawingml/2006/main">
             <a:r>
-              <a:t>A base escolhida foi Binary Alpha Digits. São 1.404 imagens, 39 por classe. Exemplos vêm do treino. Fonte: notebook do projeto e arquivo público da Universidade de Nova York.</a:t>
+              <a:t>A equipe escolheu Binary Alpha Digits no catálogo TensorFlow Datasets. O notebook baixa o arquivo bruto do endereço público indicado para a base. São 1.404 imagens, 39 por classe. Exemplos vêm do treino.</a:t>
             </a:r>
           </a:p>
         </p:txBody>
@@ -1128,7 +1128,7 @@
           <p:cNvPr id="3" name="Title">
             <a:extLst xmlns:a="http://schemas.openxmlformats.org/drawingml/2006/main">
               <a:ext uri="{FF2B5EF4-FFF2-40B4-BE49-F238E27FC236}">
-                <a16:creationId xmlns:a16="http://schemas.microsoft.com/office/drawing/2014/main" id="{92B89C37-98F1-4A8D-B725-A0B92FAC95B2}"/>
+                <a16:creationId xmlns:a16="http://schemas.microsoft.com/office/drawing/2014/main" id="{B2A39FDF-D34D-4398-9759-991FBB0364F6}"/>
               </a:ext>
             </a:extLst>
           </p:cNvPr>
@@ -1357,7 +1357,7 @@
           <p:cNvPr id="2" name="Subtitle">
             <a:extLst xmlns:a="http://schemas.openxmlformats.org/drawingml/2006/main">
               <a:ext uri="{FF2B5EF4-FFF2-40B4-BE49-F238E27FC236}">
-                <a16:creationId xmlns:a16="http://schemas.microsoft.com/office/drawing/2014/main" id="{7D3C5BA6-E106-4821-8B1D-F39D180A13C4}"/>
+                <a16:creationId xmlns:a16="http://schemas.microsoft.com/office/drawing/2014/main" id="{44359F63-A995-4C17-BD6E-55342E0172DB}"/>
               </a:ext>
             </a:extLst>
           </p:cNvPr>
@@ -1603,7 +1603,7 @@
           <p:cNvPr id="2" name="Section title">
             <a:extLst xmlns:a="http://schemas.openxmlformats.org/drawingml/2006/main">
               <a:ext uri="{FF2B5EF4-FFF2-40B4-BE49-F238E27FC236}">
-                <a16:creationId xmlns:a16="http://schemas.microsoft.com/office/drawing/2014/main" id="{8F39AED6-9449-4E21-908A-5F7E4CC3FB06}"/>
+                <a16:creationId xmlns:a16="http://schemas.microsoft.com/office/drawing/2014/main" id="{0C76C3F7-34C2-429E-B469-F006C646A441}"/>
               </a:ext>
             </a:extLst>
           </p:cNvPr>
@@ -1849,7 +1849,7 @@
           <p:cNvPr id="3" name="Title">
             <a:extLst xmlns:a="http://schemas.openxmlformats.org/drawingml/2006/main">
               <a:ext uri="{FF2B5EF4-FFF2-40B4-BE49-F238E27FC236}">
-                <a16:creationId xmlns:a16="http://schemas.microsoft.com/office/drawing/2014/main" id="{AF4FAFEF-DABF-4D06-8917-5A06B1C39A5C}"/>
+                <a16:creationId xmlns:a16="http://schemas.microsoft.com/office/drawing/2014/main" id="{B36E16E1-DBCD-4BE3-A34B-7E54B6641F06}"/>
               </a:ext>
             </a:extLst>
           </p:cNvPr>
@@ -2078,7 +2078,7 @@
           <p:cNvPr id="2" name="Body">
             <a:extLst xmlns:a="http://schemas.openxmlformats.org/drawingml/2006/main">
               <a:ext uri="{FF2B5EF4-FFF2-40B4-BE49-F238E27FC236}">
-                <a16:creationId xmlns:a16="http://schemas.microsoft.com/office/drawing/2014/main" id="{0240A954-EF4B-4B72-9160-B286D4A444C0}"/>
+                <a16:creationId xmlns:a16="http://schemas.microsoft.com/office/drawing/2014/main" id="{332B52EF-0CC1-4641-8A75-FF704EF5FEB7}"/>
               </a:ext>
             </a:extLst>
           </p:cNvPr>
@@ -2324,7 +2324,7 @@
           <p:cNvPr id="4" name="Title">
             <a:extLst xmlns:a="http://schemas.openxmlformats.org/drawingml/2006/main">
               <a:ext uri="{FF2B5EF4-FFF2-40B4-BE49-F238E27FC236}">
-                <a16:creationId xmlns:a16="http://schemas.microsoft.com/office/drawing/2014/main" id="{BDBA10A2-30ED-4A21-BDC5-6CDE0619EB85}"/>
+                <a16:creationId xmlns:a16="http://schemas.microsoft.com/office/drawing/2014/main" id="{FEAF0CCB-3326-4B88-AE49-6E23DE6F2516}"/>
               </a:ext>
             </a:extLst>
           </p:cNvPr>
@@ -2553,7 +2553,7 @@
           <p:cNvPr id="2" name="Left column">
             <a:extLst xmlns:a="http://schemas.openxmlformats.org/drawingml/2006/main">
               <a:ext uri="{FF2B5EF4-FFF2-40B4-BE49-F238E27FC236}">
-                <a16:creationId xmlns:a16="http://schemas.microsoft.com/office/drawing/2014/main" id="{282B0C6C-8C59-4BB4-AEFD-C1091D75B1DC}"/>
+                <a16:creationId xmlns:a16="http://schemas.microsoft.com/office/drawing/2014/main" id="{4E63FBF0-3B97-4754-A5C1-D040377BCE29}"/>
               </a:ext>
             </a:extLst>
           </p:cNvPr>
@@ -2782,7 +2782,7 @@
           <p:cNvPr id="3" name="Right column">
             <a:extLst xmlns:a="http://schemas.openxmlformats.org/drawingml/2006/main">
               <a:ext uri="{FF2B5EF4-FFF2-40B4-BE49-F238E27FC236}">
-                <a16:creationId xmlns:a16="http://schemas.microsoft.com/office/drawing/2014/main" id="{68890540-5766-4C42-864F-75D253C6B824}"/>
+                <a16:creationId xmlns:a16="http://schemas.microsoft.com/office/drawing/2014/main" id="{BC7486F5-BE17-4F24-A166-03914FCC4C2D}"/>
               </a:ext>
             </a:extLst>
           </p:cNvPr>
@@ -3028,7 +3028,7 @@
           <p:cNvPr id="3" name="Title">
             <a:extLst xmlns:a="http://schemas.openxmlformats.org/drawingml/2006/main">
               <a:ext uri="{FF2B5EF4-FFF2-40B4-BE49-F238E27FC236}">
-                <a16:creationId xmlns:a16="http://schemas.microsoft.com/office/drawing/2014/main" id="{FD478695-AD03-48AC-9B00-9185BD487E34}"/>
+                <a16:creationId xmlns:a16="http://schemas.microsoft.com/office/drawing/2014/main" id="{654D8E9C-4F48-43DE-9DF5-22843F8709CE}"/>
               </a:ext>
             </a:extLst>
           </p:cNvPr>
@@ -3257,7 +3257,7 @@
           <p:cNvPr id="2" name="Left column">
             <a:extLst xmlns:a="http://schemas.openxmlformats.org/drawingml/2006/main">
               <a:ext uri="{FF2B5EF4-FFF2-40B4-BE49-F238E27FC236}">
-                <a16:creationId xmlns:a16="http://schemas.microsoft.com/office/drawing/2014/main" id="{60A215AD-1E1F-4B1F-91C8-F503836D3CA6}"/>
+                <a16:creationId xmlns:a16="http://schemas.microsoft.com/office/drawing/2014/main" id="{B4C2615A-A64F-4CA6-B5CB-CA6FA238EC5D}"/>
               </a:ext>
             </a:extLst>
           </p:cNvPr>
@@ -3524,12 +3524,12 @@
   </p:cSld>
   <p:clrMap bg1="lt1" tx1="dk1" bg2="lt2" tx2="dk2" accent1="accent1" accent2="accent2" accent3="accent3" accent4="accent4" accent5="accent5" accent6="accent6" hlink="hlink" folHlink="folHlink"/>
   <p:sldLayoutIdLst>
-    <p:sldLayoutId xmlns:r="http://schemas.openxmlformats.org/officeDocument/2006/relationships" id="2147483649" r:id="R9fbdfc5436114821"/>
-    <p:sldLayoutId xmlns:r="http://schemas.openxmlformats.org/officeDocument/2006/relationships" id="2147483650" r:id="R76a6684d8def4b44"/>
-    <p:sldLayoutId xmlns:r="http://schemas.openxmlformats.org/officeDocument/2006/relationships" id="2147483651" r:id="R8a0be9b771014494"/>
-    <p:sldLayoutId xmlns:r="http://schemas.openxmlformats.org/officeDocument/2006/relationships" id="2147483652" r:id="R2d817e556ecd4b29"/>
-    <p:sldLayoutId xmlns:r="http://schemas.openxmlformats.org/officeDocument/2006/relationships" id="2147483653" r:id="R10d89c5822be4b07"/>
-    <p:sldLayoutId xmlns:r="http://schemas.openxmlformats.org/officeDocument/2006/relationships" id="2147483654" r:id="Rbb5f6651b4574968"/>
+    <p:sldLayoutId xmlns:r="http://schemas.openxmlformats.org/officeDocument/2006/relationships" id="2147483649" r:id="R36e3bf7f3a404884"/>
+    <p:sldLayoutId xmlns:r="http://schemas.openxmlformats.org/officeDocument/2006/relationships" id="2147483650" r:id="R970f42ea67574aaf"/>
+    <p:sldLayoutId xmlns:r="http://schemas.openxmlformats.org/officeDocument/2006/relationships" id="2147483651" r:id="R6a3af038f18348cc"/>
+    <p:sldLayoutId xmlns:r="http://schemas.openxmlformats.org/officeDocument/2006/relationships" id="2147483652" r:id="R39997cb2aa5d428b"/>
+    <p:sldLayoutId xmlns:r="http://schemas.openxmlformats.org/officeDocument/2006/relationships" id="2147483653" r:id="Ra3fff127d4294ad8"/>
+    <p:sldLayoutId xmlns:r="http://schemas.openxmlformats.org/officeDocument/2006/relationships" id="2147483654" r:id="Rf1f203c9f42e4290"/>
   </p:sldLayoutIdLst>
   <p:txStyles>
     <p:titleStyle>
@@ -4080,7 +4080,7 @@
           <p:cNvPr id="6" name="">
             <a:extLst xmlns:a="http://schemas.openxmlformats.org/drawingml/2006/main">
               <a:ext uri="{FF2B5EF4-FFF2-40B4-BE49-F238E27FC236}">
-                <a16:creationId xmlns:a16="http://schemas.microsoft.com/office/drawing/2014/main" id="{2E9CDF0B-EACD-4334-9C88-19FE42AC791D}"/>
+                <a16:creationId xmlns:a16="http://schemas.microsoft.com/office/drawing/2014/main" id="{CE6EE804-B477-494E-9DB3-7EEB335C5DA2}"/>
               </a:ext>
             </a:extLst>
           </p:cNvPr>
@@ -4236,7 +4236,7 @@
           <p:cNvPr id="2" name="">
             <a:extLst xmlns:a="http://schemas.openxmlformats.org/drawingml/2006/main">
               <a:ext uri="{FF2B5EF4-FFF2-40B4-BE49-F238E27FC236}">
-                <a16:creationId xmlns:a16="http://schemas.microsoft.com/office/drawing/2014/main" id="{DB02538C-A3E3-46D3-BC1E-401378A474C8}"/>
+                <a16:creationId xmlns:a16="http://schemas.microsoft.com/office/drawing/2014/main" id="{7135BB00-645E-4E8F-92C0-98745D71D260}"/>
               </a:ext>
             </a:extLst>
           </p:cNvPr>
@@ -4392,7 +4392,7 @@
           <p:cNvPr id="3" name="">
             <a:extLst xmlns:a="http://schemas.openxmlformats.org/drawingml/2006/main">
               <a:ext uri="{FF2B5EF4-FFF2-40B4-BE49-F238E27FC236}">
-                <a16:creationId xmlns:a16="http://schemas.microsoft.com/office/drawing/2014/main" id="{17C9CE03-5E80-4CC6-A31A-8DD669FD68A8}"/>
+                <a16:creationId xmlns:a16="http://schemas.microsoft.com/office/drawing/2014/main" id="{0914C91A-3124-4BB9-9933-C0C84C7BAC44}"/>
               </a:ext>
             </a:extLst>
           </p:cNvPr>
@@ -4548,7 +4548,7 @@
           <p:cNvPr id="4" name="">
             <a:extLst xmlns:a="http://schemas.openxmlformats.org/drawingml/2006/main">
               <a:ext uri="{FF2B5EF4-FFF2-40B4-BE49-F238E27FC236}">
-                <a16:creationId xmlns:a16="http://schemas.microsoft.com/office/drawing/2014/main" id="{3ABF607A-DE03-4A92-B4A4-E0D3A8A1687D}"/>
+                <a16:creationId xmlns:a16="http://schemas.microsoft.com/office/drawing/2014/main" id="{9C22287A-E0DB-4650-8300-849427509D59}"/>
               </a:ext>
             </a:extLst>
           </p:cNvPr>
@@ -4727,7 +4727,7 @@
           <p:cNvPr id="5" name="">
             <a:extLst xmlns:a="http://schemas.openxmlformats.org/drawingml/2006/main">
               <a:ext uri="{FF2B5EF4-FFF2-40B4-BE49-F238E27FC236}">
-                <a16:creationId xmlns:a16="http://schemas.microsoft.com/office/drawing/2014/main" id="{352310A5-96F6-4D7E-ABCD-BEB65597CE01}"/>
+                <a16:creationId xmlns:a16="http://schemas.microsoft.com/office/drawing/2014/main" id="{1330787F-5078-44CB-A323-75A543E4CF69}"/>
               </a:ext>
             </a:extLst>
           </p:cNvPr>
@@ -4904,7 +4904,7 @@
     </p:spTree>
     <p:extLst>
       <p:ext uri="{BB962C8B-B14F-4D97-AF65-F5344CB8AC3E}">
-        <p14:creationId xmlns:p14="http://schemas.microsoft.com/office/powerpoint/2010/main" val="1288376426"/>
+        <p14:creationId xmlns:p14="http://schemas.microsoft.com/office/powerpoint/2010/main" val="1956698736"/>
       </p:ext>
     </p:extLst>
   </p:cSld>
@@ -4935,7 +4935,7 @@
           <p:cNvPr id="7" name="">
             <a:extLst xmlns:a="http://schemas.openxmlformats.org/drawingml/2006/main">
               <a:ext uri="{FF2B5EF4-FFF2-40B4-BE49-F238E27FC236}">
-                <a16:creationId xmlns:a16="http://schemas.microsoft.com/office/drawing/2014/main" id="{838E5B59-18AA-4897-A1A0-5F06C93B08AE}"/>
+                <a16:creationId xmlns:a16="http://schemas.microsoft.com/office/drawing/2014/main" id="{3BD1C275-55F0-422C-AD8D-1414B00DDFE3}"/>
               </a:ext>
             </a:extLst>
           </p:cNvPr>
@@ -5091,7 +5091,7 @@
           <p:cNvPr id="2" name="">
             <a:extLst xmlns:a="http://schemas.openxmlformats.org/drawingml/2006/main">
               <a:ext uri="{FF2B5EF4-FFF2-40B4-BE49-F238E27FC236}">
-                <a16:creationId xmlns:a16="http://schemas.microsoft.com/office/drawing/2014/main" id="{B860BAA3-3C2C-4F66-9009-4471BA708781}"/>
+                <a16:creationId xmlns:a16="http://schemas.microsoft.com/office/drawing/2014/main" id="{99576E7A-FD21-4078-BF31-DE7F8641BC71}"/>
               </a:ext>
             </a:extLst>
           </p:cNvPr>
@@ -5247,7 +5247,7 @@
           <p:cNvPr id="3" name="">
             <a:extLst xmlns:a="http://schemas.openxmlformats.org/drawingml/2006/main">
               <a:ext uri="{FF2B5EF4-FFF2-40B4-BE49-F238E27FC236}">
-                <a16:creationId xmlns:a16="http://schemas.microsoft.com/office/drawing/2014/main" id="{B5977B23-F9EC-4A70-B24C-5C1436CD6CA8}"/>
+                <a16:creationId xmlns:a16="http://schemas.microsoft.com/office/drawing/2014/main" id="{16BBBE38-8F42-4F8D-8103-B19566FA3BC4}"/>
               </a:ext>
             </a:extLst>
           </p:cNvPr>
@@ -5403,7 +5403,7 @@
           <p:cNvPr id="4" name="">
             <a:extLst xmlns:a="http://schemas.openxmlformats.org/drawingml/2006/main">
               <a:ext uri="{FF2B5EF4-FFF2-40B4-BE49-F238E27FC236}">
-                <a16:creationId xmlns:a16="http://schemas.microsoft.com/office/drawing/2014/main" id="{D5DD59AB-F47B-412E-96B9-27BA08C079DA}"/>
+                <a16:creationId xmlns:a16="http://schemas.microsoft.com/office/drawing/2014/main" id="{AC693284-84A0-422A-BB2C-E62D12E91AA3}"/>
               </a:ext>
             </a:extLst>
           </p:cNvPr>
@@ -5559,7 +5559,7 @@
           <p:cNvPr id="5" name="">
             <a:extLst xmlns:a="http://schemas.openxmlformats.org/drawingml/2006/main">
               <a:ext uri="{FF2B5EF4-FFF2-40B4-BE49-F238E27FC236}">
-                <a16:creationId xmlns:a16="http://schemas.microsoft.com/office/drawing/2014/main" id="{03BF421E-13FD-4F8F-BDD8-173CD58CAB78}"/>
+                <a16:creationId xmlns:a16="http://schemas.microsoft.com/office/drawing/2014/main" id="{7FFAE966-7E1D-4764-9638-1B82522C4ED2}"/>
               </a:ext>
             </a:extLst>
           </p:cNvPr>
@@ -5761,7 +5761,7 @@
           <p:cNvPr id="6" name="">
             <a:extLst xmlns:a="http://schemas.openxmlformats.org/drawingml/2006/main">
               <a:ext uri="{FF2B5EF4-FFF2-40B4-BE49-F238E27FC236}">
-                <a16:creationId xmlns:a16="http://schemas.microsoft.com/office/drawing/2014/main" id="{3B79CFD9-7510-4A86-90D7-4890C3A27C3D}"/>
+                <a16:creationId xmlns:a16="http://schemas.microsoft.com/office/drawing/2014/main" id="{07E259B6-CDC8-48FD-B563-ABA18471FA73}"/>
               </a:ext>
             </a:extLst>
           </p:cNvPr>
@@ -5915,7 +5915,7 @@
     </p:spTree>
     <p:extLst>
       <p:ext uri="{BB962C8B-B14F-4D97-AF65-F5344CB8AC3E}">
-        <p14:creationId xmlns:p14="http://schemas.microsoft.com/office/powerpoint/2010/main" val="1047315027"/>
+        <p14:creationId xmlns:p14="http://schemas.microsoft.com/office/powerpoint/2010/main" val="1091405359"/>
       </p:ext>
     </p:extLst>
   </p:cSld>
@@ -5946,7 +5946,7 @@
           <p:cNvPr id="10" name="">
             <a:extLst xmlns:a="http://schemas.openxmlformats.org/drawingml/2006/main">
               <a:ext uri="{FF2B5EF4-FFF2-40B4-BE49-F238E27FC236}">
-                <a16:creationId xmlns:a16="http://schemas.microsoft.com/office/drawing/2014/main" id="{F0195C08-FDC2-471D-BAF2-DBB1D40D3E27}"/>
+                <a16:creationId xmlns:a16="http://schemas.microsoft.com/office/drawing/2014/main" id="{D3268A65-0703-4C98-9524-CC76E9A3046B}"/>
               </a:ext>
             </a:extLst>
           </p:cNvPr>
@@ -6102,7 +6102,7 @@
           <p:cNvPr id="2" name="">
             <a:extLst xmlns:a="http://schemas.openxmlformats.org/drawingml/2006/main">
               <a:ext uri="{FF2B5EF4-FFF2-40B4-BE49-F238E27FC236}">
-                <a16:creationId xmlns:a16="http://schemas.microsoft.com/office/drawing/2014/main" id="{4ABFE0E6-3215-4EFD-AACE-AC57335A6819}"/>
+                <a16:creationId xmlns:a16="http://schemas.microsoft.com/office/drawing/2014/main" id="{FCBBFACA-C6A1-4331-BCAE-221C92DEC944}"/>
               </a:ext>
             </a:extLst>
           </p:cNvPr>
@@ -6258,7 +6258,7 @@
           <p:cNvPr id="3" name="">
             <a:extLst xmlns:a="http://schemas.openxmlformats.org/drawingml/2006/main">
               <a:ext uri="{FF2B5EF4-FFF2-40B4-BE49-F238E27FC236}">
-                <a16:creationId xmlns:a16="http://schemas.microsoft.com/office/drawing/2014/main" id="{8605B901-0B9D-4196-B504-3F291EAE190F}"/>
+                <a16:creationId xmlns:a16="http://schemas.microsoft.com/office/drawing/2014/main" id="{501FFD19-25D7-4C9C-A31F-8626A6DAD218}"/>
               </a:ext>
             </a:extLst>
           </p:cNvPr>
@@ -6414,7 +6414,7 @@
           <p:cNvPr id="4" name="">
             <a:extLst xmlns:a="http://schemas.openxmlformats.org/drawingml/2006/main">
               <a:ext uri="{FF2B5EF4-FFF2-40B4-BE49-F238E27FC236}">
-                <a16:creationId xmlns:a16="http://schemas.microsoft.com/office/drawing/2014/main" id="{FCC49F17-3389-4139-A9E4-E16E54C4759F}"/>
+                <a16:creationId xmlns:a16="http://schemas.microsoft.com/office/drawing/2014/main" id="{8F1D9939-D470-4F76-A2DB-ECA462856479}"/>
               </a:ext>
             </a:extLst>
           </p:cNvPr>
@@ -6570,7 +6570,7 @@
           <p:cNvPr id="5" name="">
             <a:extLst xmlns:a="http://schemas.openxmlformats.org/drawingml/2006/main">
               <a:ext uri="{FF2B5EF4-FFF2-40B4-BE49-F238E27FC236}">
-                <a16:creationId xmlns:a16="http://schemas.microsoft.com/office/drawing/2014/main" id="{0995729D-59AB-4B3F-A690-3067A61E60AC}"/>
+                <a16:creationId xmlns:a16="http://schemas.microsoft.com/office/drawing/2014/main" id="{540F9C33-F91C-4289-B213-DA66EEDE4BFD}"/>
               </a:ext>
             </a:extLst>
           </p:cNvPr>
@@ -6749,7 +6749,7 @@
           <p:cNvPr id="6" name="">
             <a:extLst xmlns:a="http://schemas.openxmlformats.org/drawingml/2006/main">
               <a:ext uri="{FF2B5EF4-FFF2-40B4-BE49-F238E27FC236}">
-                <a16:creationId xmlns:a16="http://schemas.microsoft.com/office/drawing/2014/main" id="{3E1D3501-18A0-4502-B40C-EE2E8BCFAF6A}"/>
+                <a16:creationId xmlns:a16="http://schemas.microsoft.com/office/drawing/2014/main" id="{F94BBF93-3810-439A-8370-264529E53974}"/>
               </a:ext>
             </a:extLst>
           </p:cNvPr>
@@ -6905,7 +6905,7 @@
           <p:cNvPr id="7" name="">
             <a:extLst xmlns:a="http://schemas.openxmlformats.org/drawingml/2006/main">
               <a:ext uri="{FF2B5EF4-FFF2-40B4-BE49-F238E27FC236}">
-                <a16:creationId xmlns:a16="http://schemas.microsoft.com/office/drawing/2014/main" id="{300C6361-11F4-4CED-AF67-8EA90CC99954}"/>
+                <a16:creationId xmlns:a16="http://schemas.microsoft.com/office/drawing/2014/main" id="{1592A0B3-DAA1-40EA-8E58-95D7FAC4D2AA}"/>
               </a:ext>
             </a:extLst>
           </p:cNvPr>
@@ -7084,7 +7084,7 @@
           <p:cNvPr id="8" name="">
             <a:extLst xmlns:a="http://schemas.openxmlformats.org/drawingml/2006/main">
               <a:ext uri="{FF2B5EF4-FFF2-40B4-BE49-F238E27FC236}">
-                <a16:creationId xmlns:a16="http://schemas.microsoft.com/office/drawing/2014/main" id="{3CD6AB04-58F6-4B26-854B-1D91413F3EF5}"/>
+                <a16:creationId xmlns:a16="http://schemas.microsoft.com/office/drawing/2014/main" id="{9A8A135E-54DB-408E-A425-5B3A63272C2F}"/>
               </a:ext>
             </a:extLst>
           </p:cNvPr>
@@ -7240,7 +7240,7 @@
           <p:cNvPr id="9" name="">
             <a:extLst xmlns:a="http://schemas.openxmlformats.org/drawingml/2006/main">
               <a:ext uri="{FF2B5EF4-FFF2-40B4-BE49-F238E27FC236}">
-                <a16:creationId xmlns:a16="http://schemas.microsoft.com/office/drawing/2014/main" id="{E4AEFE9D-4756-4C4A-B523-65CBB9560658}"/>
+                <a16:creationId xmlns:a16="http://schemas.microsoft.com/office/drawing/2014/main" id="{A5795958-E334-40DD-81E6-FC6430BB33FC}"/>
               </a:ext>
             </a:extLst>
           </p:cNvPr>
@@ -7394,7 +7394,7 @@
     </p:spTree>
     <p:extLst>
       <p:ext uri="{BB962C8B-B14F-4D97-AF65-F5344CB8AC3E}">
-        <p14:creationId xmlns:p14="http://schemas.microsoft.com/office/powerpoint/2010/main" val="100742228"/>
+        <p14:creationId xmlns:p14="http://schemas.microsoft.com/office/powerpoint/2010/main" val="726024473"/>
       </p:ext>
     </p:extLst>
   </p:cSld>
@@ -7422,10 +7422,10 @@
       </p:grpSpPr>
       <p:sp>
         <p:nvSpPr>
-          <p:cNvPr id="7" name="">
+          <p:cNvPr id="8" name="">
             <a:extLst xmlns:a="http://schemas.openxmlformats.org/drawingml/2006/main">
               <a:ext uri="{FF2B5EF4-FFF2-40B4-BE49-F238E27FC236}">
-                <a16:creationId xmlns:a16="http://schemas.microsoft.com/office/drawing/2014/main" id="{6545FF33-063C-4D2D-BDCA-2BF687E1643A}"/>
+                <a16:creationId xmlns:a16="http://schemas.microsoft.com/office/drawing/2014/main" id="{41FF6225-936E-4D20-BA54-E166EFBAD8DF}"/>
               </a:ext>
             </a:extLst>
           </p:cNvPr>
@@ -7581,7 +7581,7 @@
           <p:cNvPr id="2" name="">
             <a:extLst xmlns:a="http://schemas.openxmlformats.org/drawingml/2006/main">
               <a:ext uri="{FF2B5EF4-FFF2-40B4-BE49-F238E27FC236}">
-                <a16:creationId xmlns:a16="http://schemas.microsoft.com/office/drawing/2014/main" id="{F3E0D17F-7B1B-4FA8-9192-CA95F5CF3627}"/>
+                <a16:creationId xmlns:a16="http://schemas.microsoft.com/office/drawing/2014/main" id="{32A32D2F-EF2E-43D9-A7B0-7529D4C88CD5}"/>
               </a:ext>
             </a:extLst>
           </p:cNvPr>
@@ -7737,7 +7737,7 @@
           <p:cNvPr id="3" name="">
             <a:extLst xmlns:a="http://schemas.openxmlformats.org/drawingml/2006/main">
               <a:ext uri="{FF2B5EF4-FFF2-40B4-BE49-F238E27FC236}">
-                <a16:creationId xmlns:a16="http://schemas.microsoft.com/office/drawing/2014/main" id="{30F438D1-409F-4693-B8E4-E95FB98192F5}"/>
+                <a16:creationId xmlns:a16="http://schemas.microsoft.com/office/drawing/2014/main" id="{12BA7012-0374-4B36-AD1D-74F359985747}"/>
               </a:ext>
             </a:extLst>
           </p:cNvPr>
@@ -7893,7 +7893,7 @@
           <p:cNvPr id="4" name="">
             <a:extLst xmlns:a="http://schemas.openxmlformats.org/drawingml/2006/main">
               <a:ext uri="{FF2B5EF4-FFF2-40B4-BE49-F238E27FC236}">
-                <a16:creationId xmlns:a16="http://schemas.microsoft.com/office/drawing/2014/main" id="{8DD955AB-7918-42A8-BD61-0AB43F715741}"/>
+                <a16:creationId xmlns:a16="http://schemas.microsoft.com/office/drawing/2014/main" id="{E686B7E5-C404-4A2A-92B9-DB0265114624}"/>
               </a:ext>
             </a:extLst>
           </p:cNvPr>
@@ -8044,12 +8044,168 @@
           </a:p>
         </p:txBody>
       </p:sp>
-      <p:pic>
-        <p:nvPicPr>
+      <p:sp>
+        <p:nvSpPr>
           <p:cNvPr id="5" name="">
             <a:extLst xmlns:a="http://schemas.openxmlformats.org/drawingml/2006/main">
               <a:ext uri="{FF2B5EF4-FFF2-40B4-BE49-F238E27FC236}">
-                <a16:creationId xmlns:a16="http://schemas.microsoft.com/office/drawing/2014/main" id="{755BAF8B-2CF7-49A1-AC85-C3B954ABF05D}"/>
+                <a16:creationId xmlns:a16="http://schemas.microsoft.com/office/drawing/2014/main" id="{DF1D1128-9FF8-4776-B08A-08DBE5A0F2AC}"/>
+              </a:ext>
+            </a:extLst>
+          </p:cNvPr>
+          <p:cNvSpPr>
+            <a:spLocks xmlns:a="http://schemas.openxmlformats.org/drawingml/2006/main" noGrp="1"/>
+          </p:cNvSpPr>
+          <p:nvPr/>
+        </p:nvSpPr>
+        <p:spPr>
+          <a:xfrm xmlns:a="http://schemas.openxmlformats.org/drawingml/2006/main">
+            <a:off x="609600" y="1847850"/>
+            <a:ext cx="10477500" cy="295275"/>
+          </a:xfrm>
+          <a:prstGeom xmlns:a="http://schemas.openxmlformats.org/drawingml/2006/main" prst="rect">
+            <a:avLst/>
+          </a:prstGeom>
+          <a:noFill xmlns:a="http://schemas.openxmlformats.org/drawingml/2006/main"/>
+          <a:ln xmlns:a="http://schemas.openxmlformats.org/drawingml/2006/main" w="0">
+            <a:noFill/>
+          </a:ln>
+        </p:spPr>
+        <p:txBody>
+          <a:bodyPr xmlns:a="http://schemas.openxmlformats.org/drawingml/2006/main"/>
+          <a:lstStyle xmlns:a="http://schemas.openxmlformats.org/drawingml/2006/main">
+            <a:defPPr>
+              <a:defRPr sz="1650" b="0">
+                <a:solidFill>
+                  <a:srgbClr val="52616B"/>
+                </a:solidFill>
+                <a:latin typeface="Arial"/>
+                <a:ea typeface="Arial"/>
+                <a:cs typeface="Arial"/>
+              </a:defRPr>
+            </a:defPPr>
+            <a:lvl1pPr>
+              <a:defRPr sz="1650" b="0">
+                <a:solidFill>
+                  <a:srgbClr val="52616B"/>
+                </a:solidFill>
+                <a:latin typeface="Arial"/>
+                <a:ea typeface="Arial"/>
+                <a:cs typeface="Arial"/>
+              </a:defRPr>
+            </a:lvl1pPr>
+            <a:lvl2pPr>
+              <a:defRPr sz="1650" b="0">
+                <a:solidFill>
+                  <a:srgbClr val="52616B"/>
+                </a:solidFill>
+                <a:latin typeface="Arial"/>
+                <a:ea typeface="Arial"/>
+                <a:cs typeface="Arial"/>
+              </a:defRPr>
+            </a:lvl2pPr>
+            <a:lvl3pPr>
+              <a:defRPr sz="1650" b="0">
+                <a:solidFill>
+                  <a:srgbClr val="52616B"/>
+                </a:solidFill>
+                <a:latin typeface="Arial"/>
+                <a:ea typeface="Arial"/>
+                <a:cs typeface="Arial"/>
+              </a:defRPr>
+            </a:lvl3pPr>
+            <a:lvl4pPr>
+              <a:defRPr sz="1650" b="0">
+                <a:solidFill>
+                  <a:srgbClr val="52616B"/>
+                </a:solidFill>
+                <a:latin typeface="Arial"/>
+                <a:ea typeface="Arial"/>
+                <a:cs typeface="Arial"/>
+              </a:defRPr>
+            </a:lvl4pPr>
+            <a:lvl5pPr>
+              <a:defRPr sz="1650" b="0">
+                <a:solidFill>
+                  <a:srgbClr val="52616B"/>
+                </a:solidFill>
+                <a:latin typeface="Arial"/>
+                <a:ea typeface="Arial"/>
+                <a:cs typeface="Arial"/>
+              </a:defRPr>
+            </a:lvl5pPr>
+            <a:lvl6pPr>
+              <a:defRPr sz="1650" b="0">
+                <a:solidFill>
+                  <a:srgbClr val="52616B"/>
+                </a:solidFill>
+                <a:latin typeface="Arial"/>
+                <a:ea typeface="Arial"/>
+                <a:cs typeface="Arial"/>
+              </a:defRPr>
+            </a:lvl6pPr>
+            <a:lvl7pPr>
+              <a:defRPr sz="1650" b="0">
+                <a:solidFill>
+                  <a:srgbClr val="52616B"/>
+                </a:solidFill>
+                <a:latin typeface="Arial"/>
+                <a:ea typeface="Arial"/>
+                <a:cs typeface="Arial"/>
+              </a:defRPr>
+            </a:lvl7pPr>
+            <a:lvl8pPr>
+              <a:defRPr sz="1650" b="0">
+                <a:solidFill>
+                  <a:srgbClr val="52616B"/>
+                </a:solidFill>
+                <a:latin typeface="Arial"/>
+                <a:ea typeface="Arial"/>
+                <a:cs typeface="Arial"/>
+              </a:defRPr>
+            </a:lvl8pPr>
+            <a:lvl9pPr>
+              <a:defRPr sz="1650" b="0">
+                <a:solidFill>
+                  <a:srgbClr val="52616B"/>
+                </a:solidFill>
+                <a:latin typeface="Arial"/>
+                <a:ea typeface="Arial"/>
+                <a:cs typeface="Arial"/>
+              </a:defRPr>
+            </a:lvl9pPr>
+          </a:lstStyle>
+          <a:p xmlns:a="http://schemas.openxmlformats.org/drawingml/2006/main">
+            <a:pPr>
+              <a:defRPr sz="1650" b="0">
+                <a:solidFill>
+                  <a:srgbClr val="52616B"/>
+                </a:solidFill>
+                <a:latin typeface="Arial"/>
+                <a:ea typeface="Arial"/>
+                <a:cs typeface="Arial"/>
+              </a:defRPr>
+            </a:pPr>
+            <a:r>
+              <a:rPr sz="1650" b="0">
+                <a:solidFill>
+                  <a:srgbClr val="52616B"/>
+                </a:solidFill>
+                <a:latin typeface="Arial"/>
+                <a:ea typeface="Arial"/>
+                <a:cs typeface="Arial"/>
+              </a:rPr>
+              <a:t>Fonte da escolha: catálogo TensorFlow Datasets.</a:t>
+            </a:r>
+          </a:p>
+        </p:txBody>
+      </p:sp>
+      <p:pic>
+        <p:nvPicPr>
+          <p:cNvPr id="6" name="">
+            <a:extLst xmlns:a="http://schemas.openxmlformats.org/drawingml/2006/main">
+              <a:ext uri="{FF2B5EF4-FFF2-40B4-BE49-F238E27FC236}">
+                <a16:creationId xmlns:a16="http://schemas.microsoft.com/office/drawing/2014/main" id="{1EF6B9F2-9D83-4B26-9C99-EFA732D7069A}"/>
               </a:ext>
             </a:extLst>
           </p:cNvPr>
@@ -8059,13 +8215,13 @@
           <p:nvPr/>
         </p:nvPicPr>
         <p:blipFill>
-          <a:blip xmlns:r="http://schemas.openxmlformats.org/officeDocument/2006/relationships" xmlns:a="http://schemas.openxmlformats.org/drawingml/2006/main" r:embed="Rb4e44a340ef64e62"/>
+          <a:blip xmlns:r="http://schemas.openxmlformats.org/officeDocument/2006/relationships" xmlns:a="http://schemas.openxmlformats.org/drawingml/2006/main" r:embed="R20506bd6412443fd"/>
           <a:stretch xmlns:a="http://schemas.openxmlformats.org/drawingml/2006/main"/>
         </p:blipFill>
         <p:spPr>
           <a:xfrm xmlns:a="http://schemas.openxmlformats.org/drawingml/2006/main">
-            <a:off x="2625222" y="2028825"/>
-            <a:ext cx="6941556" cy="3857625"/>
+            <a:off x="2839468" y="2152650"/>
+            <a:ext cx="6513065" cy="3619500"/>
           </a:xfrm>
           <a:prstGeom xmlns:a="http://schemas.openxmlformats.org/drawingml/2006/main" prst="rect">
             <a:avLst/>
@@ -8074,10 +8230,10 @@
       </p:pic>
       <p:sp>
         <p:nvSpPr>
-          <p:cNvPr id="6" name="">
+          <p:cNvPr id="7" name="">
             <a:extLst xmlns:a="http://schemas.openxmlformats.org/drawingml/2006/main">
               <a:ext uri="{FF2B5EF4-FFF2-40B4-BE49-F238E27FC236}">
-                <a16:creationId xmlns:a16="http://schemas.microsoft.com/office/drawing/2014/main" id="{460C5650-4908-4B59-BAF8-BF63C3B2F7E0}"/>
+                <a16:creationId xmlns:a16="http://schemas.microsoft.com/office/drawing/2014/main" id="{F769B764-DE11-4FCB-A774-2DFAEA266451}"/>
               </a:ext>
             </a:extLst>
           </p:cNvPr>
@@ -8231,7 +8387,7 @@
     </p:spTree>
     <p:extLst>
       <p:ext uri="{BB962C8B-B14F-4D97-AF65-F5344CB8AC3E}">
-        <p14:creationId xmlns:p14="http://schemas.microsoft.com/office/powerpoint/2010/main" val="1656058192"/>
+        <p14:creationId xmlns:p14="http://schemas.microsoft.com/office/powerpoint/2010/main" val="1702455924"/>
       </p:ext>
     </p:extLst>
   </p:cSld>
@@ -8262,7 +8418,7 @@
           <p:cNvPr id="7" name="">
             <a:extLst xmlns:a="http://schemas.openxmlformats.org/drawingml/2006/main">
               <a:ext uri="{FF2B5EF4-FFF2-40B4-BE49-F238E27FC236}">
-                <a16:creationId xmlns:a16="http://schemas.microsoft.com/office/drawing/2014/main" id="{FCBB2776-D196-4E0B-8E0E-16A0F6C5C749}"/>
+                <a16:creationId xmlns:a16="http://schemas.microsoft.com/office/drawing/2014/main" id="{C1212C56-FFF6-4A2D-80A5-68ECDDABE9D0}"/>
               </a:ext>
             </a:extLst>
           </p:cNvPr>
@@ -8418,7 +8574,7 @@
           <p:cNvPr id="2" name="">
             <a:extLst xmlns:a="http://schemas.openxmlformats.org/drawingml/2006/main">
               <a:ext uri="{FF2B5EF4-FFF2-40B4-BE49-F238E27FC236}">
-                <a16:creationId xmlns:a16="http://schemas.microsoft.com/office/drawing/2014/main" id="{04084ECE-2B30-4E58-8FCB-65B039A91827}"/>
+                <a16:creationId xmlns:a16="http://schemas.microsoft.com/office/drawing/2014/main" id="{B0620598-529A-4882-9189-58F9D8F7EA0F}"/>
               </a:ext>
             </a:extLst>
           </p:cNvPr>
@@ -8574,7 +8730,7 @@
           <p:cNvPr id="3" name="">
             <a:extLst xmlns:a="http://schemas.openxmlformats.org/drawingml/2006/main">
               <a:ext uri="{FF2B5EF4-FFF2-40B4-BE49-F238E27FC236}">
-                <a16:creationId xmlns:a16="http://schemas.microsoft.com/office/drawing/2014/main" id="{73931DAD-E1F6-4C55-A782-E47C01C0A01F}"/>
+                <a16:creationId xmlns:a16="http://schemas.microsoft.com/office/drawing/2014/main" id="{C3AF78E3-98DE-4994-A357-8DBAF17E96C5}"/>
               </a:ext>
             </a:extLst>
           </p:cNvPr>
@@ -8730,7 +8886,7 @@
           <p:cNvPr id="4" name="">
             <a:extLst xmlns:a="http://schemas.openxmlformats.org/drawingml/2006/main">
               <a:ext uri="{FF2B5EF4-FFF2-40B4-BE49-F238E27FC236}">
-                <a16:creationId xmlns:a16="http://schemas.microsoft.com/office/drawing/2014/main" id="{18A380BD-B4A9-4D3A-8F0A-B06823B834AB}"/>
+                <a16:creationId xmlns:a16="http://schemas.microsoft.com/office/drawing/2014/main" id="{5BDD52A6-6ADA-4A88-8EFF-A12FD3FC7BBE}"/>
               </a:ext>
             </a:extLst>
           </p:cNvPr>
@@ -8909,7 +9065,7 @@
           <p:cNvPr id="5" name="">
             <a:extLst xmlns:a="http://schemas.openxmlformats.org/drawingml/2006/main">
               <a:ext uri="{FF2B5EF4-FFF2-40B4-BE49-F238E27FC236}">
-                <a16:creationId xmlns:a16="http://schemas.microsoft.com/office/drawing/2014/main" id="{16A0A216-54B0-44FE-8E2F-27EDD9FA9108}"/>
+                <a16:creationId xmlns:a16="http://schemas.microsoft.com/office/drawing/2014/main" id="{E22BC063-5337-49DE-886E-3CE6D8C1A6B7}"/>
               </a:ext>
             </a:extLst>
           </p:cNvPr>
@@ -9420,7 +9576,7 @@
           <p:cNvPr id="6" name="">
             <a:extLst xmlns:a="http://schemas.openxmlformats.org/drawingml/2006/main">
               <a:ext uri="{FF2B5EF4-FFF2-40B4-BE49-F238E27FC236}">
-                <a16:creationId xmlns:a16="http://schemas.microsoft.com/office/drawing/2014/main" id="{B2601BF5-077C-4EB2-ACB1-EA01F3EA3E30}"/>
+                <a16:creationId xmlns:a16="http://schemas.microsoft.com/office/drawing/2014/main" id="{2F10B6BA-50B4-4074-89AF-970767CE6E0D}"/>
               </a:ext>
             </a:extLst>
           </p:cNvPr>
@@ -9574,7 +9730,7 @@
     </p:spTree>
     <p:extLst>
       <p:ext uri="{BB962C8B-B14F-4D97-AF65-F5344CB8AC3E}">
-        <p14:creationId xmlns:p14="http://schemas.microsoft.com/office/powerpoint/2010/main" val="109044421"/>
+        <p14:creationId xmlns:p14="http://schemas.microsoft.com/office/powerpoint/2010/main" val="788624066"/>
       </p:ext>
     </p:extLst>
   </p:cSld>
@@ -9605,7 +9761,7 @@
           <p:cNvPr id="6" name="">
             <a:extLst xmlns:a="http://schemas.openxmlformats.org/drawingml/2006/main">
               <a:ext uri="{FF2B5EF4-FFF2-40B4-BE49-F238E27FC236}">
-                <a16:creationId xmlns:a16="http://schemas.microsoft.com/office/drawing/2014/main" id="{44F87B12-9958-4204-9E29-0458B292B3BB}"/>
+                <a16:creationId xmlns:a16="http://schemas.microsoft.com/office/drawing/2014/main" id="{F5293CEB-96B6-4B0B-975A-8137439673AE}"/>
               </a:ext>
             </a:extLst>
           </p:cNvPr>
@@ -9761,7 +9917,7 @@
           <p:cNvPr id="2" name="">
             <a:extLst xmlns:a="http://schemas.openxmlformats.org/drawingml/2006/main">
               <a:ext uri="{FF2B5EF4-FFF2-40B4-BE49-F238E27FC236}">
-                <a16:creationId xmlns:a16="http://schemas.microsoft.com/office/drawing/2014/main" id="{DE857214-A7FA-4F93-9471-757993EC7A28}"/>
+                <a16:creationId xmlns:a16="http://schemas.microsoft.com/office/drawing/2014/main" id="{2BFE5CC3-CCD4-4B2A-B4D6-BAF123C07D1F}"/>
               </a:ext>
             </a:extLst>
           </p:cNvPr>
@@ -9917,7 +10073,7 @@
           <p:cNvPr id="3" name="">
             <a:extLst xmlns:a="http://schemas.openxmlformats.org/drawingml/2006/main">
               <a:ext uri="{FF2B5EF4-FFF2-40B4-BE49-F238E27FC236}">
-                <a16:creationId xmlns:a16="http://schemas.microsoft.com/office/drawing/2014/main" id="{4AF78490-9253-4773-A3FC-C8F6343AD49F}"/>
+                <a16:creationId xmlns:a16="http://schemas.microsoft.com/office/drawing/2014/main" id="{E1466786-A265-428C-9BC5-1D42DBBC2E8A}"/>
               </a:ext>
             </a:extLst>
           </p:cNvPr>
@@ -10073,7 +10229,7 @@
           <p:cNvPr id="4" name="">
             <a:extLst xmlns:a="http://schemas.openxmlformats.org/drawingml/2006/main">
               <a:ext uri="{FF2B5EF4-FFF2-40B4-BE49-F238E27FC236}">
-                <a16:creationId xmlns:a16="http://schemas.microsoft.com/office/drawing/2014/main" id="{447A6FD4-C4EB-425A-BCA2-03650451602C}"/>
+                <a16:creationId xmlns:a16="http://schemas.microsoft.com/office/drawing/2014/main" id="{B7394253-CB0A-423A-9E64-B037693EAB69}"/>
               </a:ext>
             </a:extLst>
           </p:cNvPr>
@@ -10593,7 +10749,7 @@
           <p:cNvPr id="5" name="">
             <a:extLst xmlns:a="http://schemas.openxmlformats.org/drawingml/2006/main">
               <a:ext uri="{FF2B5EF4-FFF2-40B4-BE49-F238E27FC236}">
-                <a16:creationId xmlns:a16="http://schemas.microsoft.com/office/drawing/2014/main" id="{4983665E-7BAF-4C17-BCD4-7EE7ECD2F922}"/>
+                <a16:creationId xmlns:a16="http://schemas.microsoft.com/office/drawing/2014/main" id="{BF535768-A7DB-477A-A4C3-AB8A0B4A66BC}"/>
               </a:ext>
             </a:extLst>
           </p:cNvPr>
@@ -10747,7 +10903,7 @@
     </p:spTree>
     <p:extLst>
       <p:ext uri="{BB962C8B-B14F-4D97-AF65-F5344CB8AC3E}">
-        <p14:creationId xmlns:p14="http://schemas.microsoft.com/office/powerpoint/2010/main" val="1088406599"/>
+        <p14:creationId xmlns:p14="http://schemas.microsoft.com/office/powerpoint/2010/main" val="333894579"/>
       </p:ext>
     </p:extLst>
   </p:cSld>
@@ -10778,7 +10934,7 @@
           <p:cNvPr id="8" name="">
             <a:extLst xmlns:a="http://schemas.openxmlformats.org/drawingml/2006/main">
               <a:ext uri="{FF2B5EF4-FFF2-40B4-BE49-F238E27FC236}">
-                <a16:creationId xmlns:a16="http://schemas.microsoft.com/office/drawing/2014/main" id="{3BF1EA90-5C36-47B7-AB51-176CDF6F236A}"/>
+                <a16:creationId xmlns:a16="http://schemas.microsoft.com/office/drawing/2014/main" id="{7B25223A-DC24-4970-95E4-5FE23C9E81FD}"/>
               </a:ext>
             </a:extLst>
           </p:cNvPr>
@@ -10934,7 +11090,7 @@
           <p:cNvPr id="2" name="">
             <a:extLst xmlns:a="http://schemas.openxmlformats.org/drawingml/2006/main">
               <a:ext uri="{FF2B5EF4-FFF2-40B4-BE49-F238E27FC236}">
-                <a16:creationId xmlns:a16="http://schemas.microsoft.com/office/drawing/2014/main" id="{AEB9E77F-06CE-4F76-A954-EA6478D87310}"/>
+                <a16:creationId xmlns:a16="http://schemas.microsoft.com/office/drawing/2014/main" id="{E6B10586-2D48-4491-A325-1E85180E0ACD}"/>
               </a:ext>
             </a:extLst>
           </p:cNvPr>
@@ -11090,7 +11246,7 @@
           <p:cNvPr id="3" name="">
             <a:extLst xmlns:a="http://schemas.openxmlformats.org/drawingml/2006/main">
               <a:ext uri="{FF2B5EF4-FFF2-40B4-BE49-F238E27FC236}">
-                <a16:creationId xmlns:a16="http://schemas.microsoft.com/office/drawing/2014/main" id="{60802556-2C7A-4E6B-A202-5586D9504922}"/>
+                <a16:creationId xmlns:a16="http://schemas.microsoft.com/office/drawing/2014/main" id="{86814DEF-5467-45FC-9961-9EC36C9F80E0}"/>
               </a:ext>
             </a:extLst>
           </p:cNvPr>
@@ -11246,7 +11402,7 @@
           <p:cNvPr id="4" name="">
             <a:extLst xmlns:a="http://schemas.openxmlformats.org/drawingml/2006/main">
               <a:ext uri="{FF2B5EF4-FFF2-40B4-BE49-F238E27FC236}">
-                <a16:creationId xmlns:a16="http://schemas.microsoft.com/office/drawing/2014/main" id="{462B96B5-2C09-425D-B292-0A03CC28C170}"/>
+                <a16:creationId xmlns:a16="http://schemas.microsoft.com/office/drawing/2014/main" id="{0FD6861C-0D8D-4205-AF83-5C97E544435B}"/>
               </a:ext>
             </a:extLst>
           </p:cNvPr>
@@ -11448,7 +11604,7 @@
           <p:cNvPr id="5" name="">
             <a:extLst xmlns:a="http://schemas.openxmlformats.org/drawingml/2006/main">
               <a:ext uri="{FF2B5EF4-FFF2-40B4-BE49-F238E27FC236}">
-                <a16:creationId xmlns:a16="http://schemas.microsoft.com/office/drawing/2014/main" id="{20F1056C-DF19-4929-BF11-5AAB0DD615F9}"/>
+                <a16:creationId xmlns:a16="http://schemas.microsoft.com/office/drawing/2014/main" id="{5BC0D6BB-F151-4B5B-851C-1FA086933B45}"/>
               </a:ext>
             </a:extLst>
           </p:cNvPr>
@@ -11650,7 +11806,7 @@
           <p:cNvPr id="6" name="">
             <a:extLst xmlns:a="http://schemas.openxmlformats.org/drawingml/2006/main">
               <a:ext uri="{FF2B5EF4-FFF2-40B4-BE49-F238E27FC236}">
-                <a16:creationId xmlns:a16="http://schemas.microsoft.com/office/drawing/2014/main" id="{D844C901-C884-4867-AB36-A239DD42D4D3}"/>
+                <a16:creationId xmlns:a16="http://schemas.microsoft.com/office/drawing/2014/main" id="{42DD6111-EB91-4AD7-BE85-0BA0148159EA}"/>
               </a:ext>
             </a:extLst>
           </p:cNvPr>
@@ -11806,7 +11962,7 @@
           <p:cNvPr id="7" name="">
             <a:extLst xmlns:a="http://schemas.openxmlformats.org/drawingml/2006/main">
               <a:ext uri="{FF2B5EF4-FFF2-40B4-BE49-F238E27FC236}">
-                <a16:creationId xmlns:a16="http://schemas.microsoft.com/office/drawing/2014/main" id="{B4DCAB65-9FBC-4F32-AAE5-05172943D7CE}"/>
+                <a16:creationId xmlns:a16="http://schemas.microsoft.com/office/drawing/2014/main" id="{47EC7D1A-F087-4726-9220-E456B99FC621}"/>
               </a:ext>
             </a:extLst>
           </p:cNvPr>
@@ -11960,7 +12116,7 @@
     </p:spTree>
     <p:extLst>
       <p:ext uri="{BB962C8B-B14F-4D97-AF65-F5344CB8AC3E}">
-        <p14:creationId xmlns:p14="http://schemas.microsoft.com/office/powerpoint/2010/main" val="1222114844"/>
+        <p14:creationId xmlns:p14="http://schemas.microsoft.com/office/powerpoint/2010/main" val="98784369"/>
       </p:ext>
     </p:extLst>
   </p:cSld>
@@ -11991,7 +12147,7 @@
           <p:cNvPr id="6" name="">
             <a:extLst xmlns:a="http://schemas.openxmlformats.org/drawingml/2006/main">
               <a:ext uri="{FF2B5EF4-FFF2-40B4-BE49-F238E27FC236}">
-                <a16:creationId xmlns:a16="http://schemas.microsoft.com/office/drawing/2014/main" id="{C1967D02-E20D-4573-AB2E-A5806A1DD591}"/>
+                <a16:creationId xmlns:a16="http://schemas.microsoft.com/office/drawing/2014/main" id="{5BE78351-0552-46BC-8630-D38DF1A67234}"/>
               </a:ext>
             </a:extLst>
           </p:cNvPr>
@@ -12147,7 +12303,7 @@
           <p:cNvPr id="2" name="">
             <a:extLst xmlns:a="http://schemas.openxmlformats.org/drawingml/2006/main">
               <a:ext uri="{FF2B5EF4-FFF2-40B4-BE49-F238E27FC236}">
-                <a16:creationId xmlns:a16="http://schemas.microsoft.com/office/drawing/2014/main" id="{B054134A-4236-40FA-B23E-C11588208A90}"/>
+                <a16:creationId xmlns:a16="http://schemas.microsoft.com/office/drawing/2014/main" id="{56D9C43D-48E8-4641-81A9-B86347941B69}"/>
               </a:ext>
             </a:extLst>
           </p:cNvPr>
@@ -12303,7 +12459,7 @@
           <p:cNvPr id="3" name="">
             <a:extLst xmlns:a="http://schemas.openxmlformats.org/drawingml/2006/main">
               <a:ext uri="{FF2B5EF4-FFF2-40B4-BE49-F238E27FC236}">
-                <a16:creationId xmlns:a16="http://schemas.microsoft.com/office/drawing/2014/main" id="{991D41F2-1A91-4732-9629-3C3C963A7C15}"/>
+                <a16:creationId xmlns:a16="http://schemas.microsoft.com/office/drawing/2014/main" id="{571A422A-FA7B-41F7-8722-2186A3712DBA}"/>
               </a:ext>
             </a:extLst>
           </p:cNvPr>
@@ -12459,7 +12615,7 @@
           <p:cNvPr id="4" name="">
             <a:extLst xmlns:a="http://schemas.openxmlformats.org/drawingml/2006/main">
               <a:ext uri="{FF2B5EF4-FFF2-40B4-BE49-F238E27FC236}">
-                <a16:creationId xmlns:a16="http://schemas.microsoft.com/office/drawing/2014/main" id="{E6F96AAE-4686-4061-99AE-3600E2A37045}"/>
+                <a16:creationId xmlns:a16="http://schemas.microsoft.com/office/drawing/2014/main" id="{9777E5E1-B2D9-4EC4-AA70-A0441A00A4B3}"/>
               </a:ext>
             </a:extLst>
           </p:cNvPr>
@@ -13086,7 +13242,7 @@
           <p:cNvPr id="5" name="">
             <a:extLst xmlns:a="http://schemas.openxmlformats.org/drawingml/2006/main">
               <a:ext uri="{FF2B5EF4-FFF2-40B4-BE49-F238E27FC236}">
-                <a16:creationId xmlns:a16="http://schemas.microsoft.com/office/drawing/2014/main" id="{C95A8E5F-545C-492F-87EC-063F2804DD0D}"/>
+                <a16:creationId xmlns:a16="http://schemas.microsoft.com/office/drawing/2014/main" id="{40CA8602-3970-407A-81D8-15E1B9C5452B}"/>
               </a:ext>
             </a:extLst>
           </p:cNvPr>
@@ -13240,7 +13396,7 @@
     </p:spTree>
     <p:extLst>
       <p:ext uri="{BB962C8B-B14F-4D97-AF65-F5344CB8AC3E}">
-        <p14:creationId xmlns:p14="http://schemas.microsoft.com/office/powerpoint/2010/main" val="557379410"/>
+        <p14:creationId xmlns:p14="http://schemas.microsoft.com/office/powerpoint/2010/main" val="1120990121"/>
       </p:ext>
     </p:extLst>
   </p:cSld>
@@ -13271,7 +13427,7 @@
           <p:cNvPr id="7" name="">
             <a:extLst xmlns:a="http://schemas.openxmlformats.org/drawingml/2006/main">
               <a:ext uri="{FF2B5EF4-FFF2-40B4-BE49-F238E27FC236}">
-                <a16:creationId xmlns:a16="http://schemas.microsoft.com/office/drawing/2014/main" id="{2B536967-DDA4-48D2-B7C7-069FED46BCB4}"/>
+                <a16:creationId xmlns:a16="http://schemas.microsoft.com/office/drawing/2014/main" id="{39D39A8A-BD9D-4521-B609-80C73DE6AFCE}"/>
               </a:ext>
             </a:extLst>
           </p:cNvPr>
@@ -13427,7 +13583,7 @@
           <p:cNvPr id="2" name="">
             <a:extLst xmlns:a="http://schemas.openxmlformats.org/drawingml/2006/main">
               <a:ext uri="{FF2B5EF4-FFF2-40B4-BE49-F238E27FC236}">
-                <a16:creationId xmlns:a16="http://schemas.microsoft.com/office/drawing/2014/main" id="{95953D71-96DF-4DDF-B2DA-A92ADF109CD6}"/>
+                <a16:creationId xmlns:a16="http://schemas.microsoft.com/office/drawing/2014/main" id="{8E1D4D0B-CE20-402B-97AC-EDDDEC1866CE}"/>
               </a:ext>
             </a:extLst>
           </p:cNvPr>
@@ -13583,7 +13739,7 @@
           <p:cNvPr id="3" name="">
             <a:extLst xmlns:a="http://schemas.openxmlformats.org/drawingml/2006/main">
               <a:ext uri="{FF2B5EF4-FFF2-40B4-BE49-F238E27FC236}">
-                <a16:creationId xmlns:a16="http://schemas.microsoft.com/office/drawing/2014/main" id="{9CB8A483-69DD-456A-80F1-F985F7651DFE}"/>
+                <a16:creationId xmlns:a16="http://schemas.microsoft.com/office/drawing/2014/main" id="{71DA39BD-36B3-471D-8B3C-E547CB83F565}"/>
               </a:ext>
             </a:extLst>
           </p:cNvPr>
@@ -13739,7 +13895,7 @@
           <p:cNvPr id="4" name="">
             <a:extLst xmlns:a="http://schemas.openxmlformats.org/drawingml/2006/main">
               <a:ext uri="{FF2B5EF4-FFF2-40B4-BE49-F238E27FC236}">
-                <a16:creationId xmlns:a16="http://schemas.microsoft.com/office/drawing/2014/main" id="{FD6315CC-09B2-475D-8A3C-B2CB9AC5E42A}"/>
+                <a16:creationId xmlns:a16="http://schemas.microsoft.com/office/drawing/2014/main" id="{DDE7A50A-3854-4DB7-BFA8-D4E2EE4B1CD6}"/>
               </a:ext>
             </a:extLst>
           </p:cNvPr>
@@ -13749,7 +13905,7 @@
           <p:nvPr/>
         </p:nvPicPr>
         <p:blipFill>
-          <a:blip xmlns:r="http://schemas.openxmlformats.org/officeDocument/2006/relationships" xmlns:a="http://schemas.openxmlformats.org/drawingml/2006/main" r:embed="R2ae182a9a1734cfc"/>
+          <a:blip xmlns:r="http://schemas.openxmlformats.org/officeDocument/2006/relationships" xmlns:a="http://schemas.openxmlformats.org/drawingml/2006/main" r:embed="Rdcb39e8594b94cbf"/>
           <a:stretch xmlns:a="http://schemas.openxmlformats.org/drawingml/2006/main"/>
         </p:blipFill>
         <p:spPr>
@@ -13767,7 +13923,7 @@
           <p:cNvPr id="5" name="">
             <a:extLst xmlns:a="http://schemas.openxmlformats.org/drawingml/2006/main">
               <a:ext uri="{FF2B5EF4-FFF2-40B4-BE49-F238E27FC236}">
-                <a16:creationId xmlns:a16="http://schemas.microsoft.com/office/drawing/2014/main" id="{C25DF55F-0ED4-4C0B-BCCF-DA646477F703}"/>
+                <a16:creationId xmlns:a16="http://schemas.microsoft.com/office/drawing/2014/main" id="{94D5A257-0872-4B4A-971B-FE6D83A4E724}"/>
               </a:ext>
             </a:extLst>
           </p:cNvPr>
@@ -13923,7 +14079,7 @@
           <p:cNvPr id="6" name="">
             <a:extLst xmlns:a="http://schemas.openxmlformats.org/drawingml/2006/main">
               <a:ext uri="{FF2B5EF4-FFF2-40B4-BE49-F238E27FC236}">
-                <a16:creationId xmlns:a16="http://schemas.microsoft.com/office/drawing/2014/main" id="{1F0DC563-2334-4623-AB53-8525308855FF}"/>
+                <a16:creationId xmlns:a16="http://schemas.microsoft.com/office/drawing/2014/main" id="{F238FF9A-73B7-4DBA-BEEC-0EAF2BB233E2}"/>
               </a:ext>
             </a:extLst>
           </p:cNvPr>
@@ -14100,7 +14256,7 @@
     </p:spTree>
     <p:extLst>
       <p:ext uri="{BB962C8B-B14F-4D97-AF65-F5344CB8AC3E}">
-        <p14:creationId xmlns:p14="http://schemas.microsoft.com/office/powerpoint/2010/main" val="247602894"/>
+        <p14:creationId xmlns:p14="http://schemas.microsoft.com/office/powerpoint/2010/main" val="29579917"/>
       </p:ext>
     </p:extLst>
   </p:cSld>
@@ -14131,7 +14287,7 @@
           <p:cNvPr id="7" name="">
             <a:extLst xmlns:a="http://schemas.openxmlformats.org/drawingml/2006/main">
               <a:ext uri="{FF2B5EF4-FFF2-40B4-BE49-F238E27FC236}">
-                <a16:creationId xmlns:a16="http://schemas.microsoft.com/office/drawing/2014/main" id="{7AF522C8-7AFF-4E73-B79F-F9875CE0AE88}"/>
+                <a16:creationId xmlns:a16="http://schemas.microsoft.com/office/drawing/2014/main" id="{454E030A-4A66-42CC-BCB0-F0C4D7822329}"/>
               </a:ext>
             </a:extLst>
           </p:cNvPr>
@@ -14287,7 +14443,7 @@
           <p:cNvPr id="2" name="">
             <a:extLst xmlns:a="http://schemas.openxmlformats.org/drawingml/2006/main">
               <a:ext uri="{FF2B5EF4-FFF2-40B4-BE49-F238E27FC236}">
-                <a16:creationId xmlns:a16="http://schemas.microsoft.com/office/drawing/2014/main" id="{597177F5-FD68-41AE-999F-4A8AE36E7C44}"/>
+                <a16:creationId xmlns:a16="http://schemas.microsoft.com/office/drawing/2014/main" id="{2D03637D-3781-4D56-ADB1-350A7A262265}"/>
               </a:ext>
             </a:extLst>
           </p:cNvPr>
@@ -14443,7 +14599,7 @@
           <p:cNvPr id="3" name="">
             <a:extLst xmlns:a="http://schemas.openxmlformats.org/drawingml/2006/main">
               <a:ext uri="{FF2B5EF4-FFF2-40B4-BE49-F238E27FC236}">
-                <a16:creationId xmlns:a16="http://schemas.microsoft.com/office/drawing/2014/main" id="{3D46B7F0-8881-4920-913C-435D4A1B7AC9}"/>
+                <a16:creationId xmlns:a16="http://schemas.microsoft.com/office/drawing/2014/main" id="{75A5FE71-689D-4BA3-B46B-D5335EA2A212}"/>
               </a:ext>
             </a:extLst>
           </p:cNvPr>
@@ -14599,7 +14755,7 @@
           <p:cNvPr id="4" name="">
             <a:extLst xmlns:a="http://schemas.openxmlformats.org/drawingml/2006/main">
               <a:ext uri="{FF2B5EF4-FFF2-40B4-BE49-F238E27FC236}">
-                <a16:creationId xmlns:a16="http://schemas.microsoft.com/office/drawing/2014/main" id="{E9A6D2A6-0FBD-4ABD-8D16-B4EE8A35DA84}"/>
+                <a16:creationId xmlns:a16="http://schemas.microsoft.com/office/drawing/2014/main" id="{7621DBD8-6D00-4EF6-ABBE-5F78CC2F783D}"/>
               </a:ext>
             </a:extLst>
           </p:cNvPr>
@@ -14994,7 +15150,7 @@
           <p:cNvPr id="5" name="">
             <a:extLst xmlns:a="http://schemas.openxmlformats.org/drawingml/2006/main">
               <a:ext uri="{FF2B5EF4-FFF2-40B4-BE49-F238E27FC236}">
-                <a16:creationId xmlns:a16="http://schemas.microsoft.com/office/drawing/2014/main" id="{F4F31A86-468D-415E-8DFD-57DEBCFD29B9}"/>
+                <a16:creationId xmlns:a16="http://schemas.microsoft.com/office/drawing/2014/main" id="{BEDCE69F-DB88-4764-9AF2-163C43C53C5F}"/>
               </a:ext>
             </a:extLst>
           </p:cNvPr>
@@ -15004,7 +15160,7 @@
           <p:nvPr/>
         </p:nvPicPr>
         <p:blipFill>
-          <a:blip xmlns:r="http://schemas.openxmlformats.org/officeDocument/2006/relationships" xmlns:a="http://schemas.openxmlformats.org/drawingml/2006/main" r:embed="Rf6e385bf3bab4c40"/>
+          <a:blip xmlns:r="http://schemas.openxmlformats.org/officeDocument/2006/relationships" xmlns:a="http://schemas.openxmlformats.org/drawingml/2006/main" r:embed="Rf5ddcc90e6d64d9a"/>
           <a:stretch xmlns:a="http://schemas.openxmlformats.org/drawingml/2006/main"/>
         </p:blipFill>
         <p:spPr>
@@ -15022,7 +15178,7 @@
           <p:cNvPr id="6" name="">
             <a:extLst xmlns:a="http://schemas.openxmlformats.org/drawingml/2006/main">
               <a:ext uri="{FF2B5EF4-FFF2-40B4-BE49-F238E27FC236}">
-                <a16:creationId xmlns:a16="http://schemas.microsoft.com/office/drawing/2014/main" id="{C0B281EA-321E-49E7-81E2-6C512CB754F7}"/>
+                <a16:creationId xmlns:a16="http://schemas.microsoft.com/office/drawing/2014/main" id="{3CC61242-3C4F-4071-8797-90A47FCB089D}"/>
               </a:ext>
             </a:extLst>
           </p:cNvPr>
@@ -15227,7 +15383,7 @@
     </p:spTree>
     <p:extLst>
       <p:ext uri="{BB962C8B-B14F-4D97-AF65-F5344CB8AC3E}">
-        <p14:creationId xmlns:p14="http://schemas.microsoft.com/office/powerpoint/2010/main" val="447510378"/>
+        <p14:creationId xmlns:p14="http://schemas.microsoft.com/office/powerpoint/2010/main" val="1489004854"/>
       </p:ext>
     </p:extLst>
   </p:cSld>
